--- a/flappy bird documentation.pptx
+++ b/flappy bird documentation.pptx
@@ -2701,7 +2701,7 @@
   <p:cSld>
     <p:spTree>
       <p:nvGrpSpPr>
-        <p:cNvPr id="217" name="Shape 217"/>
+        <p:cNvPr id="218" name="Shape 218"/>
         <p:cNvGrpSpPr/>
         <p:nvPr/>
       </p:nvGrpSpPr>
@@ -2715,7 +2715,7 @@
       </p:grpSpPr>
       <p:sp>
         <p:nvSpPr>
-          <p:cNvPr id="218" name="Google Shape;218;g3e5682b14e3_1_111:notes"/>
+          <p:cNvPr id="219" name="Google Shape;219;g3e5682b14e3_1_111:notes"/>
           <p:cNvSpPr/>
           <p:nvPr>
             <p:ph idx="2" type="sldImg"/>
@@ -2750,7 +2750,7 @@
       </p:sp>
       <p:sp>
         <p:nvSpPr>
-          <p:cNvPr id="219" name="Google Shape;219;g3e5682b14e3_1_111:notes"/>
+          <p:cNvPr id="220" name="Google Shape;220;g3e5682b14e3_1_111:notes"/>
           <p:cNvSpPr txBox="1"/>
           <p:nvPr>
             <p:ph idx="1" type="body"/>
@@ -2800,7 +2800,7 @@
   <p:cSld>
     <p:spTree>
       <p:nvGrpSpPr>
-        <p:cNvPr id="223" name="Shape 223"/>
+        <p:cNvPr id="224" name="Shape 224"/>
         <p:cNvGrpSpPr/>
         <p:nvPr/>
       </p:nvGrpSpPr>
@@ -2814,7 +2814,7 @@
       </p:grpSpPr>
       <p:sp>
         <p:nvSpPr>
-          <p:cNvPr id="224" name="Google Shape;224;g3e5682b14e3_1_116:notes"/>
+          <p:cNvPr id="225" name="Google Shape;225;g3e5682b14e3_1_116:notes"/>
           <p:cNvSpPr/>
           <p:nvPr>
             <p:ph idx="2" type="sldImg"/>
@@ -2849,7 +2849,7 @@
       </p:sp>
       <p:sp>
         <p:nvSpPr>
-          <p:cNvPr id="225" name="Google Shape;225;g3e5682b14e3_1_116:notes"/>
+          <p:cNvPr id="226" name="Google Shape;226;g3e5682b14e3_1_116:notes"/>
           <p:cNvSpPr txBox="1"/>
           <p:nvPr>
             <p:ph idx="1" type="body"/>
@@ -2998,7 +2998,7 @@
   <p:cSld>
     <p:spTree>
       <p:nvGrpSpPr>
-        <p:cNvPr id="229" name="Shape 229"/>
+        <p:cNvPr id="230" name="Shape 230"/>
         <p:cNvGrpSpPr/>
         <p:nvPr/>
       </p:nvGrpSpPr>
@@ -3012,7 +3012,7 @@
       </p:grpSpPr>
       <p:sp>
         <p:nvSpPr>
-          <p:cNvPr id="230" name="Google Shape;230;g3e5682b14e3_1_121:notes"/>
+          <p:cNvPr id="231" name="Google Shape;231;g3e5682b14e3_1_121:notes"/>
           <p:cNvSpPr/>
           <p:nvPr>
             <p:ph idx="2" type="sldImg"/>
@@ -3047,7 +3047,7 @@
       </p:sp>
       <p:sp>
         <p:nvSpPr>
-          <p:cNvPr id="231" name="Google Shape;231;g3e5682b14e3_1_121:notes"/>
+          <p:cNvPr id="232" name="Google Shape;232;g3e5682b14e3_1_121:notes"/>
           <p:cNvSpPr txBox="1"/>
           <p:nvPr>
             <p:ph idx="1" type="body"/>
@@ -3097,7 +3097,7 @@
   <p:cSld>
     <p:spTree>
       <p:nvGrpSpPr>
-        <p:cNvPr id="235" name="Shape 235"/>
+        <p:cNvPr id="236" name="Shape 236"/>
         <p:cNvGrpSpPr/>
         <p:nvPr/>
       </p:nvGrpSpPr>
@@ -3111,7 +3111,7 @@
       </p:grpSpPr>
       <p:sp>
         <p:nvSpPr>
-          <p:cNvPr id="236" name="Google Shape;236;g3e5682b14e3_1_131:notes"/>
+          <p:cNvPr id="237" name="Google Shape;237;g3e5682b14e3_1_131:notes"/>
           <p:cNvSpPr/>
           <p:nvPr>
             <p:ph idx="2" type="sldImg"/>
@@ -3146,7 +3146,7 @@
       </p:sp>
       <p:sp>
         <p:nvSpPr>
-          <p:cNvPr id="237" name="Google Shape;237;g3e5682b14e3_1_131:notes"/>
+          <p:cNvPr id="238" name="Google Shape;238;g3e5682b14e3_1_131:notes"/>
           <p:cNvSpPr txBox="1"/>
           <p:nvPr>
             <p:ph idx="1" type="body"/>
@@ -8657,7 +8657,11 @@
             </a:pPr>
             <a:r>
               <a:rPr lang="en-GB" sz="1800"/>
-              <a:t>debug_key_actions: a dictionary of the hooks set in normal mode(debug = False mode) where the key of the dictionary is the key press as a character, space sets the bird’s velocity to the bird_jump_velocity setting, resetting the acceleration build-up in the process</a:t>
+              <a:t>normal</a:t>
+            </a:r>
+            <a:r>
+              <a:rPr lang="en-GB" sz="1800"/>
+              <a:t>_key_actions: a dictionary of the hooks set in normal mode(debug = False mode) where the key of the dictionary is the key press as a character, space sets the bird’s velocity to the bird_jump_velocity setting, resetting the acceleration build-up in the process</a:t>
             </a:r>
             <a:endParaRPr sz="1800"/>
           </a:p>
@@ -8898,7 +8902,7 @@
             </a:r>
             <a:r>
               <a:rPr lang="en-GB" sz="1800"/>
-              <a:t>ird_y: the current line the bird is at</a:t>
+              <a:t>ird_y: the current line the bird is at in the canvas</a:t>
             </a:r>
             <a:endParaRPr sz="1800"/>
           </a:p>
@@ -9031,7 +9035,7 @@
             </a:pPr>
             <a:r>
               <a:rPr lang="en-GB" sz="1800"/>
-              <a:t>Note: we are not OS API experts, nor python experts, and as such, we had used help to write this module</a:t>
+              <a:t>Note: we are not OS API experts, nor python experts, and as such, we had used considerable help to write this module</a:t>
             </a:r>
             <a:endParaRPr sz="1800"/>
           </a:p>
@@ -9063,7 +9067,7 @@
             </a:pPr>
             <a:r>
               <a:rPr lang="en-GB" sz="1800"/>
-              <a:t>As soon as the module loads it tries to import the msvcrt module, a Windows™-only module, if we are in unix, the import will throw an exception, skipping the windows only code, otherwise *nix specific code will run</a:t>
+              <a:t>As soon as the module loads it tries to import the msvcrt module, a Windows™-only module, if we are in *nix, the import will throw an exception, skipping the windows only code, otherwise *nix specific code(written in the expect block) will run</a:t>
             </a:r>
             <a:endParaRPr sz="1800"/>
           </a:p>
@@ -9084,7 +9088,7 @@
             </a:r>
             <a:r>
               <a:rPr baseline="-25000" lang="en-GB" sz="1800"/>
-              <a:t>*nix basically means unix-likes, which includes linux, mac os and the bsd’s though we had only tested code on linux</a:t>
+              <a:t>*nix basically means unix-likes, which includes linux, mac os and the bsd’s, though we had only tested code on linux</a:t>
             </a:r>
             <a:endParaRPr baseline="-25000" sz="1800"/>
           </a:p>
@@ -9116,7 +9120,7 @@
             </a:pPr>
             <a:r>
               <a:rPr lang="en-GB" sz="1800"/>
-              <a:t>Windows™ stub: we ‘or’ the current console mode for stdout state with 100b, which enables virtual terminal processing, this allows us to use terminal-controlling ascii escape sequences</a:t>
+              <a:t>Windows™ stub: we ‘or’ the current console mode for stdout state with 100b, which enables virtual terminal processing, this should allow us to use terminal-controlling ascii escape sequences if we are not allowed already</a:t>
             </a:r>
             <a:endParaRPr sz="1800"/>
           </a:p>
@@ -9248,7 +9252,7 @@
             </a:pPr>
             <a:r>
               <a:rPr lang="en-GB" sz="1800"/>
-              <a:t>We set a is_unix flag to True, this is useful for other functions</a:t>
+              <a:t>We set an is_unix flag to True, this is useful for other functions</a:t>
             </a:r>
             <a:endParaRPr sz="1800"/>
           </a:p>
@@ -9282,7 +9286,7 @@
             </a:pPr>
             <a:r>
               <a:rPr lang="en-GB" sz="1800"/>
-              <a:t>We store terminal state before setting standard input to have cbreak mode, cbreak mode allows reads to return characters as soon as a character is inserted, not as soon as enter is pressed</a:t>
+              <a:t>We store terminal state before setting standard input to use cbreak mode, cbreak mode allows read calls s to return characters as soon as a character is inserted, as opposed to returning as soon as enter is pressed</a:t>
             </a:r>
             <a:endParaRPr sz="1800"/>
           </a:p>
@@ -9428,7 +9432,7 @@
             </a:pPr>
             <a:r>
               <a:rPr lang="en-GB" sz="1800"/>
-              <a:t>This function returns the last character from the relevant queues (which basically store keypresses), this function clears the queues in the process, effectively this function returns the last character pressed since the last time this function was called (if any were pressed..)</a:t>
+              <a:t>This function returns the last character from the relevant queues (which basically store key presses), this function clears the queues in the process, effectively this function returns the last character pressed since the last time this function was called (if any were pressed..)</a:t>
             </a:r>
             <a:endParaRPr sz="1800"/>
           </a:p>
@@ -9494,7 +9498,7 @@
             </a:pPr>
             <a:r>
               <a:rPr lang="en-GB" sz="1800"/>
-              <a:t>If we are on windows we run a loop that drains getwch’s queue (by running a while if kbhit returns True)</a:t>
+              <a:t>If we are on windows we run a loop that drains getwch’s queue (by running a while as long as kbhit returns True)</a:t>
             </a:r>
             <a:endParaRPr sz="1800"/>
           </a:p>
@@ -9823,7 +9827,7 @@
             </a:pPr>
             <a:r>
               <a:rPr lang="en-GB" sz="1800"/>
-              <a:t>	running the game wiped</a:t>
+              <a:t>	running the game get wiped</a:t>
             </a:r>
             <a:endParaRPr sz="1800"/>
           </a:p>
@@ -10075,7 +10079,7 @@
             </a:pPr>
             <a:r>
               <a:rPr lang="en-GB" sz="1800"/>
-              <a:t>draw_px(ch, x, y): the lowest level draw_* function:</a:t>
+              <a:t>draw_px(ch, x, y): the lowest level draw_* function, it:</a:t>
             </a:r>
             <a:endParaRPr sz="1800"/>
           </a:p>
@@ -10276,7 +10280,7 @@
             </a:pPr>
             <a:r>
               <a:rPr lang="en-GB" sz="1800"/>
-              <a:t>It tries to draw the newest pipe, if the pipe did overwrite all the pixels that could be overwritten, then the pipe is fully inside the canvas, and update.generate_pipe() would be called, making an even newer pipe</a:t>
+              <a:t>It tries to draw the newest pipe, if the pipe did overwrite all the pixels that could be overwritten, then the pipe is fully inside the canvas, and update.generate_pipe() would be called, making a newer pipe</a:t>
             </a:r>
             <a:endParaRPr sz="1800"/>
           </a:p>
@@ -10372,7 +10376,7 @@
         </p:spPr>
         <p:txBody>
           <a:bodyPr anchorCtr="0" anchor="t" bIns="91425" lIns="91425" spcFirstLastPara="1" rIns="91425" wrap="square" tIns="91425">
-            <a:normAutofit fontScale="77500"/>
+            <a:normAutofit fontScale="77500" lnSpcReduction="10000"/>
           </a:bodyPr>
           <a:lstStyle/>
           <a:p>
@@ -10462,10 +10466,10 @@
               <a:buChar char="-"/>
             </a:pPr>
             <a:r>
-              <a:rPr lang="en-GB" sz="1800"/>
-              <a:t>It draws the bottom pipe’s vertical edges (ones made of the | character) row by row top to bottom</a:t>
-            </a:r>
-            <a:endParaRPr sz="1800"/>
+              <a:rPr baseline="30000" lang="en-GB" sz="1800"/>
+              <a:t>mind that gap_height is inclusive of the horizontal edges</a:t>
+            </a:r>
+            <a:endParaRPr baseline="30000" sz="1800"/>
           </a:p>
           <a:p>
             <a:pPr indent="-317183" lvl="0" marL="457200" rtl="0" algn="l">
@@ -10480,7 +10484,7 @@
             </a:pPr>
             <a:r>
               <a:rPr lang="en-GB" sz="1800"/>
-              <a:t>mind that gap_height is inclusive of the horizontal edges</a:t>
+              <a:t>It draws the bottom pipe’s vertical edges (ones made of the | character) row by row top to bottom</a:t>
             </a:r>
             <a:endParaRPr sz="1800"/>
           </a:p>
@@ -10512,7 +10516,7 @@
             </a:pPr>
             <a:r>
               <a:rPr lang="en-GB" sz="1800"/>
-              <a:t>The function compares the number of iterations in loops described in 1. to the number of the pixels successfully overwritten, returns a tuple of whether the numbers match (thus the pipe is fully inside the canvas), and whether there were no overwritten pixels (thus the pipe is fully outside the canvas)</a:t>
+              <a:t>The function compares the number of iterations in loops described in 1. to the number of the pixels successfully overwritten, returns a tuple of whether the numbers matched (thus whether the pipe is fully inside the canvas), and whether there were no overwritten pixels (thus whether the pipe is fully outside the canvas)</a:t>
             </a:r>
             <a:endParaRPr sz="1800"/>
           </a:p>
@@ -11031,7 +11035,7 @@
             </a:pPr>
             <a:r>
               <a:rPr lang="en-GB" sz="1800"/>
-              <a:t>show():</a:t>
+              <a:t>show(), it:</a:t>
             </a:r>
             <a:endParaRPr sz="1800"/>
           </a:p>
@@ -11048,7 +11052,7 @@
             </a:pPr>
             <a:r>
               <a:rPr lang="en-GB" sz="1800"/>
-              <a:t>It sets the terminal cursor to 0, 0 (preventing scrolling, which looked glitchy in Windows™)</a:t>
+              <a:t>Sets the terminal cursor to 0, 0 (preventing scrolling, which looked glitchy in Windows™)</a:t>
             </a:r>
             <a:endParaRPr sz="1800"/>
           </a:p>
@@ -11082,7 +11086,7 @@
             </a:pPr>
             <a:r>
               <a:rPr lang="en-GB" sz="1800"/>
-              <a:t>It joins the elements of the canvas making each element a string representing a line, and joins such strings with new lines</a:t>
+              <a:t>Joins the elements of the canvas making each element a string representing a line, and joins such strings with new lines</a:t>
             </a:r>
             <a:endParaRPr sz="1800"/>
           </a:p>
@@ -11099,7 +11103,7 @@
             </a:pPr>
             <a:r>
               <a:rPr lang="en-GB" sz="1800"/>
-              <a:t>It sets a border variable to a string of settings.width many </a:t>
+              <a:t>Sets a border variable to a string of settings.width many </a:t>
             </a:r>
             <a:r>
               <a:rPr lang="en-GB" sz="1800"/>
@@ -11124,7 +11128,7 @@
             </a:pPr>
             <a:r>
               <a:rPr lang="en-GB" sz="1800"/>
-              <a:t>Then it joins the following elements in this order: cursor reset sequence + scores, border, canvas, border, by newlines</a:t>
+              <a:t>Joins the following elements in this order: cursor reset sequence + scores, border, canvas and border, with newlines</a:t>
             </a:r>
             <a:endParaRPr sz="1800"/>
           </a:p>
@@ -11141,7 +11145,7 @@
             </a:pPr>
             <a:r>
               <a:rPr lang="en-GB" sz="1800"/>
-              <a:t>It flushes stdout just in case</a:t>
+              <a:t>Flushes the standard output just in case</a:t>
             </a:r>
             <a:endParaRPr sz="1800"/>
           </a:p>
@@ -11355,7 +11359,7 @@
             </a:pPr>
             <a:r>
               <a:rPr lang="en-GB" sz="1800"/>
-              <a:t>Checks if the score can be increased and updates it if so</a:t>
+              <a:t>Checks if the score can be increased and would update it consequently</a:t>
             </a:r>
             <a:endParaRPr sz="1800"/>
           </a:p>
@@ -11372,7 +11376,7 @@
             </a:pPr>
             <a:r>
               <a:rPr lang="en-GB" sz="1800"/>
-              <a:t>Updates the high score (both the variable and the file..) if the score was updated</a:t>
+              <a:t>Updates the high score (both the variable and the file) if the score was updated</a:t>
             </a:r>
             <a:endParaRPr sz="1800"/>
           </a:p>
@@ -11533,7 +11537,7 @@
             </a:pPr>
             <a:r>
               <a:rPr lang="en-GB" sz="1800"/>
-              <a:t>increase_score(): checks every pipe, and if a pipe didn;t increase the score and was fully </a:t>
+              <a:t>increase_score(): checks every pipe, and if a pipe didn’t increase the score and was fully </a:t>
             </a:r>
             <a:r>
               <a:rPr lang="en-GB" sz="1800"/>
@@ -11700,14 +11704,46 @@
             </a:pPr>
             <a:r>
               <a:rPr lang="en-GB" sz="1800"/>
-              <a:t>If the bird is between the vertical lines of any pipe (inclusive), and if it’s y value is either above or at the pipe’s top horizontal line, or is below or at the pipe’s bottom horizontal line</a:t>
+              <a:t>If the bird is between the vertical lines of any pipe (inclusive), and if it’s y value is either:</a:t>
+            </a:r>
+            <a:endParaRPr sz="1800"/>
+          </a:p>
+          <a:p>
+            <a:pPr indent="0" lvl="0" marL="0" rtl="0" algn="l">
+              <a:spcBef>
+                <a:spcPts val="1200"/>
+              </a:spcBef>
+              <a:spcAft>
+                <a:spcPts val="0"/>
+              </a:spcAft>
+              <a:buNone/>
+            </a:pPr>
+            <a:r>
+              <a:rPr lang="en-GB" sz="1800"/>
+              <a:t>2.1  above or at the pipe’s top horizontal line</a:t>
+            </a:r>
+            <a:endParaRPr sz="1800"/>
+          </a:p>
+          <a:p>
+            <a:pPr indent="0" lvl="0" marL="0" rtl="0" algn="l">
+              <a:spcBef>
+                <a:spcPts val="1200"/>
+              </a:spcBef>
+              <a:spcAft>
+                <a:spcPts val="0"/>
+              </a:spcAft>
+              <a:buNone/>
+            </a:pPr>
+            <a:r>
+              <a:rPr lang="en-GB" sz="1800"/>
+              <a:t>2.2  or is below or at the pipe’s bottom horizontal line</a:t>
             </a:r>
             <a:endParaRPr sz="1800"/>
           </a:p>
           <a:p>
             <a:pPr indent="-342900" lvl="0" marL="457200" rtl="0" algn="l">
               <a:spcBef>
-                <a:spcPts val="0"/>
+                <a:spcPts val="1200"/>
               </a:spcBef>
               <a:spcAft>
                 <a:spcPts val="0"/>
@@ -11884,7 +11920,7 @@
             </a:r>
             <a:r>
               <a:rPr lang="en-GB" sz="1800"/>
-              <a:t>derivation</a:t>
+              <a:t>derivation/explanation</a:t>
             </a:r>
             <a:r>
               <a:rPr lang="en-GB" sz="1800"/>
@@ -11917,7 +11953,7 @@
             </a:pPr>
             <a:r>
               <a:rPr lang="en-GB" sz="1800"/>
-              <a:t>We will refer to the function later  as minimum estimated x</a:t>
+              <a:t>We will refer to the function later as minimum estimated x</a:t>
             </a:r>
             <a:endParaRPr sz="1800"/>
           </a:p>
@@ -12380,7 +12416,7 @@
             </a:pPr>
             <a:r>
               <a:rPr lang="en-GB" sz="1800"/>
-              <a:t>Again, t is got based on either 1. Or 2. Based on arrival is jump bound or gravity bound(eq 1 is </a:t>
+              <a:t>Again, t is got based on either 1. Or 2. Based on whether arrival is jump bound or gravity bound(eq 1 is </a:t>
             </a:r>
             <a:r>
               <a:rPr lang="en-GB" sz="1800"/>
@@ -12396,7 +12432,7 @@
       </p:sp>
       <p:pic>
         <p:nvPicPr>
-          <p:cNvPr descr="\text{ 2. is used when }\triangle y \text{ is positive, and the bird needs gravity to go down}\\ &#10;\\\text{now deriving inverses of the equations 1. and 2. :}&#10;\\\text{1. }y(t) = velocity_{jump} \times t =&gt; t = \frac{\triangle y}{t}&#10;\\\text{2. } y(t) = \frac{acceleration\times t^{2}}{2} =&gt; \frac{2\times \triangle y}{acceleration}=t^{2}&#10;\\t=\sqrt{\frac{2\times \triangle y}{acceleration}}" id="216" name="Google Shape;216;p39" title="lagrida_latex_editor (4).png"/>
+          <p:cNvPr descr="\text{ 2. is used when }\triangle y \text{ is positive, and the bird needs gravity to go down}\\ &#10;\\\text{now deriving inverses of the equations 1. and 2. :}&#10;\\\text{1. }y(t) = velocity_{jump} \times t =&gt; t = \frac{\triangle y}{velocity_{jump}}&#10;\\\text{2. } y(t) = \frac{acceleration\times t^{2}}{2} =&gt; \frac{2\times \triangle y}{acceleration}=t^{2}&#10;\\t=\sqrt{\frac{2\times \triangle y}{acceleration}}" id="216" name="Google Shape;216;p39" title="lagrida_latex_editor (4).png"/>
           <p:cNvPicPr preferRelativeResize="0"/>
           <p:nvPr/>
         </p:nvPicPr>
@@ -12422,6 +12458,61 @@
           </a:ln>
         </p:spPr>
       </p:pic>
+      <p:sp>
+        <p:nvSpPr>
+          <p:cNvPr id="217" name="Google Shape;217;p39"/>
+          <p:cNvSpPr txBox="1"/>
+          <p:nvPr/>
+        </p:nvSpPr>
+        <p:spPr>
+          <a:xfrm>
+            <a:off x="5570950" y="2232625"/>
+            <a:ext cx="1177200" cy="168600"/>
+          </a:xfrm>
+          <a:prstGeom prst="rect">
+            <a:avLst/>
+          </a:prstGeom>
+          <a:solidFill>
+            <a:srgbClr val="FFF2CC"/>
+          </a:solidFill>
+          <a:ln>
+            <a:noFill/>
+          </a:ln>
+        </p:spPr>
+        <p:txBody>
+          <a:bodyPr anchorCtr="0" anchor="t" bIns="91425" lIns="91425" spcFirstLastPara="1" rIns="91425" wrap="square" tIns="91425">
+            <a:noAutofit/>
+          </a:bodyPr>
+          <a:lstStyle/>
+          <a:p>
+            <a:pPr indent="0" lvl="0" marL="0" rtl="0" algn="l">
+              <a:lnSpc>
+                <a:spcPct val="6000"/>
+              </a:lnSpc>
+              <a:spcBef>
+                <a:spcPts val="0"/>
+              </a:spcBef>
+              <a:spcAft>
+                <a:spcPts val="0"/>
+              </a:spcAft>
+              <a:buNone/>
+            </a:pPr>
+            <a:r>
+              <a:rPr lang="en-GB" sz="1800">
+                <a:solidFill>
+                  <a:schemeClr val="dk2"/>
+                </a:solidFill>
+              </a:rPr>
+              <a:t>velocity</a:t>
+            </a:r>
+            <a:endParaRPr sz="1800">
+              <a:solidFill>
+                <a:schemeClr val="dk2"/>
+              </a:solidFill>
+            </a:endParaRPr>
+          </a:p>
+        </p:txBody>
+      </p:sp>
     </p:spTree>
   </p:cSld>
   <p:clrMapOvr>
@@ -12435,7 +12526,7 @@
   <p:cSld>
     <p:spTree>
       <p:nvGrpSpPr>
-        <p:cNvPr id="220" name="Shape 220"/>
+        <p:cNvPr id="221" name="Shape 221"/>
         <p:cNvGrpSpPr/>
         <p:nvPr/>
       </p:nvGrpSpPr>
@@ -12449,7 +12540,7 @@
       </p:grpSpPr>
       <p:sp>
         <p:nvSpPr>
-          <p:cNvPr id="221" name="Google Shape;221;p40"/>
+          <p:cNvPr id="222" name="Google Shape;222;p40"/>
           <p:cNvSpPr txBox="1"/>
           <p:nvPr>
             <p:ph type="title"/>
@@ -12492,7 +12583,7 @@
       </p:sp>
       <p:sp>
         <p:nvSpPr>
-          <p:cNvPr id="222" name="Google Shape;222;p40"/>
+          <p:cNvPr id="223" name="Google Shape;223;p40"/>
           <p:cNvSpPr txBox="1"/>
           <p:nvPr>
             <p:ph idx="1" type="body"/>
@@ -12595,7 +12686,7 @@
             </a:pPr>
             <a:r>
               <a:rPr lang="en-GB" sz="1800"/>
-              <a:t>3.1. We will refer to the stored val as #3</a:t>
+              <a:t>3.1. We will refer to the stored value as #3</a:t>
             </a:r>
             <a:endParaRPr sz="1800"/>
           </a:p>
@@ -12612,7 +12703,7 @@
             </a:pPr>
             <a:r>
               <a:rPr lang="en-GB" sz="1800"/>
-              <a:t>We set x to settings.width + a random number between [#3, #3*settings.max_to_min_pipe_distance_factor clamped to settings.width - 1]</a:t>
+              <a:t>We set x to settings.width + a random number between [#3, #3 * settings.max_to_min_pipe_distance_factor clamped to settings.width - 1]</a:t>
             </a:r>
             <a:endParaRPr sz="1800"/>
           </a:p>
@@ -12628,7 +12719,7 @@
             </a:pPr>
             <a:r>
               <a:rPr lang="en-GB" sz="1800"/>
-              <a:t>4.1. We clamp because otherwise the game may crash as every pipe could be outside the canvas</a:t>
+              <a:t>4.1. We clamp because otherwise the game may crash as every pipe could be outside the canvas and get deleted</a:t>
             </a:r>
             <a:endParaRPr sz="1800"/>
           </a:p>
@@ -12664,7 +12755,7 @@
   <p:cSld>
     <p:spTree>
       <p:nvGrpSpPr>
-        <p:cNvPr id="226" name="Shape 226"/>
+        <p:cNvPr id="227" name="Shape 227"/>
         <p:cNvGrpSpPr/>
         <p:nvPr/>
       </p:nvGrpSpPr>
@@ -12678,7 +12769,7 @@
       </p:grpSpPr>
       <p:sp>
         <p:nvSpPr>
-          <p:cNvPr id="227" name="Google Shape;227;p41"/>
+          <p:cNvPr id="228" name="Google Shape;228;p41"/>
           <p:cNvSpPr txBox="1"/>
           <p:nvPr>
             <p:ph type="title"/>
@@ -12721,7 +12812,7 @@
       </p:sp>
       <p:sp>
         <p:nvSpPr>
-          <p:cNvPr id="228" name="Google Shape;228;p41"/>
+          <p:cNvPr id="229" name="Google Shape;229;p41"/>
           <p:cNvSpPr txBox="1"/>
           <p:nvPr>
             <p:ph idx="1" type="body"/>
@@ -12757,7 +12848,7 @@
             </a:pPr>
             <a:r>
               <a:rPr lang="en-GB" sz="1800"/>
-              <a:t>delete_first_pipe(): removes the head pipe with O(n) time, we could have used a deque, but, the gains are so minimal, and time is short, and we wanted to keep some stuff simple</a:t>
+              <a:t>delete_first_pipe(): removes the head pipe with O(n) time, we could have used a deque, but, the gains are minimal, and time is short, and we wanted to keep some stuff simple</a:t>
             </a:r>
             <a:endParaRPr sz="1800"/>
           </a:p>
@@ -12926,7 +13017,7 @@
             </a:br>
             <a:r>
               <a:rPr lang="en-GB" sz="1800"/>
-              <a:t>A top-down coordinate system is used, the position of objects stored as the upper-leftmost character</a:t>
+              <a:t>A top-down coordinate system is used, with the position of objects stored as the upper-leftmost character</a:t>
             </a:r>
             <a:endParaRPr sz="1800"/>
           </a:p>
@@ -12945,7 +13036,7 @@
   <p:cSld>
     <p:spTree>
       <p:nvGrpSpPr>
-        <p:cNvPr id="232" name="Shape 232"/>
+        <p:cNvPr id="233" name="Shape 233"/>
         <p:cNvGrpSpPr/>
         <p:nvPr/>
       </p:nvGrpSpPr>
@@ -12959,7 +13050,7 @@
       </p:grpSpPr>
       <p:sp>
         <p:nvSpPr>
-          <p:cNvPr id="233" name="Google Shape;233;p42"/>
+          <p:cNvPr id="234" name="Google Shape;234;p42"/>
           <p:cNvSpPr txBox="1"/>
           <p:nvPr>
             <p:ph type="title"/>
@@ -13002,7 +13093,7 @@
       </p:sp>
       <p:sp>
         <p:nvSpPr>
-          <p:cNvPr id="234" name="Google Shape;234;p42"/>
+          <p:cNvPr id="235" name="Google Shape;235;p42"/>
           <p:cNvSpPr txBox="1"/>
           <p:nvPr>
             <p:ph idx="1" type="body"/>
@@ -13022,18 +13113,18 @@
         </p:spPr>
         <p:txBody>
           <a:bodyPr anchorCtr="0" anchor="t" bIns="91425" lIns="91425" spcFirstLastPara="1" rIns="91425" wrap="square" tIns="91425">
-            <a:normAutofit lnSpcReduction="20000"/>
+            <a:normAutofit fontScale="85000" lnSpcReduction="10000"/>
           </a:bodyPr>
           <a:lstStyle/>
           <a:p>
-            <a:pPr indent="-342900" lvl="0" marL="457200" rtl="0" algn="l">
-              <a:spcBef>
-                <a:spcPts val="0"/>
-              </a:spcBef>
-              <a:spcAft>
-                <a:spcPts val="0"/>
-              </a:spcAft>
-              <a:buSzPts val="1800"/>
+            <a:pPr indent="-325755" lvl="0" marL="457200" rtl="0" algn="l">
+              <a:spcBef>
+                <a:spcPts val="0"/>
+              </a:spcBef>
+              <a:spcAft>
+                <a:spcPts val="0"/>
+              </a:spcAft>
+              <a:buSzPct val="100000"/>
               <a:buChar char="●"/>
             </a:pPr>
             <a:r>
@@ -13043,14 +13134,14 @@
             <a:endParaRPr sz="1800"/>
           </a:p>
           <a:p>
-            <a:pPr indent="-342900" lvl="0" marL="457200" rtl="0" algn="l">
-              <a:spcBef>
-                <a:spcPts val="0"/>
-              </a:spcBef>
-              <a:spcAft>
-                <a:spcPts val="0"/>
-              </a:spcAft>
-              <a:buSzPts val="1800"/>
+            <a:pPr indent="-325755" lvl="0" marL="457200" rtl="0" algn="l">
+              <a:spcBef>
+                <a:spcPts val="0"/>
+              </a:spcBef>
+              <a:spcAft>
+                <a:spcPts val="0"/>
+              </a:spcAft>
+              <a:buSzPct val="100000"/>
               <a:buChar char="-"/>
             </a:pPr>
             <a:r>
@@ -13060,14 +13151,14 @@
             <a:endParaRPr sz="1800"/>
           </a:p>
           <a:p>
-            <a:pPr indent="-342900" lvl="0" marL="457200" rtl="0" algn="l">
-              <a:spcBef>
-                <a:spcPts val="0"/>
-              </a:spcBef>
-              <a:spcAft>
-                <a:spcPts val="0"/>
-              </a:spcAft>
-              <a:buSzPts val="1800"/>
+            <a:pPr indent="-325755" lvl="0" marL="457200" rtl="0" algn="l">
+              <a:spcBef>
+                <a:spcPts val="0"/>
+              </a:spcBef>
+              <a:spcAft>
+                <a:spcPts val="0"/>
+              </a:spcAft>
+              <a:buSzPct val="100000"/>
               <a:buChar char="-"/>
             </a:pPr>
             <a:r>
@@ -13077,14 +13168,14 @@
             <a:endParaRPr sz="1800"/>
           </a:p>
           <a:p>
-            <a:pPr indent="-342900" lvl="0" marL="457200" rtl="0" algn="l">
-              <a:spcBef>
-                <a:spcPts val="0"/>
-              </a:spcBef>
-              <a:spcAft>
-                <a:spcPts val="0"/>
-              </a:spcAft>
-              <a:buSzPts val="1800"/>
+            <a:pPr indent="-325755" lvl="0" marL="457200" rtl="0" algn="l">
+              <a:spcBef>
+                <a:spcPts val="0"/>
+              </a:spcBef>
+              <a:spcAft>
+                <a:spcPts val="0"/>
+              </a:spcAft>
+              <a:buSzPct val="100000"/>
               <a:buChar char="-"/>
             </a:pPr>
             <a:r>
@@ -13113,27 +13204,19 @@
             <a:endParaRPr sz="1800"/>
           </a:p>
           <a:p>
-            <a:pPr indent="-342900" lvl="0" marL="457200" rtl="0" algn="l">
+            <a:pPr indent="-325755" lvl="0" marL="457200" rtl="0" algn="l">
               <a:spcBef>
                 <a:spcPts val="1200"/>
               </a:spcBef>
               <a:spcAft>
                 <a:spcPts val="0"/>
               </a:spcAft>
-              <a:buSzPts val="1800"/>
+              <a:buSzPct val="100000"/>
               <a:buChar char="●"/>
             </a:pPr>
             <a:r>
               <a:rPr lang="en-GB" sz="1800"/>
-              <a:t>LLMs  and internet had </a:t>
-            </a:r>
-            <a:r>
-              <a:rPr lang="en-GB" sz="1800"/>
-              <a:t>barely</a:t>
-            </a:r>
-            <a:r>
-              <a:rPr lang="en-GB" sz="1800"/>
-              <a:t> helped in logic (just in i/o and draw_pipe, i think), and we wrote even this documentation manually</a:t>
+              <a:t>LLMs  and internet had lightly helped in logic (it had mostly helped in I/O, one had used it for draw_pipe(), idk of other uses), and we wrote this documentation manually</a:t>
             </a:r>
             <a:endParaRPr sz="1800"/>
           </a:p>
@@ -13153,14 +13236,14 @@
             <a:endParaRPr sz="1800"/>
           </a:p>
           <a:p>
-            <a:pPr indent="-342900" lvl="0" marL="457200" rtl="0" algn="l">
+            <a:pPr indent="-325755" lvl="0" marL="457200" rtl="0" algn="l">
               <a:spcBef>
                 <a:spcPts val="1200"/>
               </a:spcBef>
               <a:spcAft>
                 <a:spcPts val="0"/>
               </a:spcAft>
-              <a:buSzPts val="1800"/>
+              <a:buSzPct val="100000"/>
               <a:buChar char="●"/>
             </a:pPr>
             <a:r>
@@ -13192,7 +13275,7 @@
   <p:cSld>
     <p:spTree>
       <p:nvGrpSpPr>
-        <p:cNvPr id="238" name="Shape 238"/>
+        <p:cNvPr id="239" name="Shape 239"/>
         <p:cNvGrpSpPr/>
         <p:nvPr/>
       </p:nvGrpSpPr>
@@ -13206,7 +13289,7 @@
       </p:grpSpPr>
       <p:sp>
         <p:nvSpPr>
-          <p:cNvPr id="239" name="Google Shape;239;p43"/>
+          <p:cNvPr id="240" name="Google Shape;240;p43"/>
           <p:cNvSpPr txBox="1"/>
           <p:nvPr>
             <p:ph type="title"/>
@@ -13249,7 +13332,7 @@
       </p:sp>
       <p:sp>
         <p:nvSpPr>
-          <p:cNvPr id="240" name="Google Shape;240;p43"/>
+          <p:cNvPr id="241" name="Google Shape;241;p43"/>
           <p:cNvSpPr txBox="1"/>
           <p:nvPr>
             <p:ph idx="1" type="body"/>
@@ -13269,7 +13352,7 @@
         </p:spPr>
         <p:txBody>
           <a:bodyPr anchorCtr="0" anchor="t" bIns="91425" lIns="91425" spcFirstLastPara="1" rIns="91425" wrap="square" tIns="91425">
-            <a:normAutofit/>
+            <a:normAutofit lnSpcReduction="10000"/>
           </a:bodyPr>
           <a:lstStyle/>
           <a:p>
@@ -13317,7 +13400,7 @@
             </a:pPr>
             <a:r>
               <a:rPr lang="en-GB" sz="1800"/>
-              <a:t>Making stars outside the canvas had made the bird hitting them inconsistent with the bird hitting the pipes, as the bird becomes invisible in the former case</a:t>
+              <a:t>Making stars outside the canvas had made the bird hitting them inconsistent with the bird hitting the pipes (visually), as the bird becomes invisible in the former case, but visible in the latter one</a:t>
             </a:r>
             <a:endParaRPr sz="1800"/>
           </a:p>
@@ -13516,7 +13599,7 @@
             </a:pPr>
             <a:r>
               <a:rPr lang="en-GB" sz="1800"/>
-              <a:t>passed: whether the bird had already moved passed the pipe</a:t>
+              <a:t>passed: whether the bird had already moved past the pipe</a:t>
             </a:r>
             <a:endParaRPr sz="1800"/>
           </a:p>
@@ -13648,11 +13731,11 @@
         </p:spPr>
         <p:txBody>
           <a:bodyPr anchorCtr="0" anchor="t" bIns="91425" lIns="91425" spcFirstLastPara="1" rIns="91425" wrap="square" tIns="91425">
-            <a:normAutofit fontScale="77500" lnSpcReduction="10000"/>
+            <a:normAutofit fontScale="85000" lnSpcReduction="20000"/>
           </a:bodyPr>
           <a:lstStyle/>
           <a:p>
-            <a:pPr indent="-317183" lvl="0" marL="457200" rtl="0" algn="l">
+            <a:pPr indent="-325755" lvl="0" marL="457200" rtl="0" algn="l">
               <a:spcBef>
                 <a:spcPts val="0"/>
               </a:spcBef>
@@ -13669,7 +13752,7 @@
             <a:endParaRPr sz="1800"/>
           </a:p>
           <a:p>
-            <a:pPr indent="-317183" lvl="0" marL="457200" rtl="0" algn="l">
+            <a:pPr indent="-325755" lvl="0" marL="457200" rtl="0" algn="l">
               <a:spcBef>
                 <a:spcPts val="0"/>
               </a:spcBef>
@@ -13686,7 +13769,7 @@
             <a:endParaRPr sz="1800"/>
           </a:p>
           <a:p>
-            <a:pPr indent="-317183" lvl="0" marL="457200" rtl="0" algn="l">
+            <a:pPr indent="-325755" lvl="0" marL="457200" rtl="0" algn="l">
               <a:spcBef>
                 <a:spcPts val="0"/>
               </a:spcBef>
@@ -13703,7 +13786,7 @@
             <a:endParaRPr sz="1800"/>
           </a:p>
           <a:p>
-            <a:pPr indent="-317183" lvl="0" marL="457200" rtl="0" algn="l">
+            <a:pPr indent="-325755" lvl="0" marL="457200" rtl="0" algn="l">
               <a:spcBef>
                 <a:spcPts val="0"/>
               </a:spcBef>
@@ -13735,7 +13818,7 @@
             <a:endParaRPr sz="1800"/>
           </a:p>
           <a:p>
-            <a:pPr indent="-317183" lvl="0" marL="457200" rtl="0" algn="l">
+            <a:pPr indent="-325755" lvl="0" marL="457200" rtl="0" algn="l">
               <a:spcBef>
                 <a:spcPts val="1200"/>
               </a:spcBef>
@@ -13747,7 +13830,7 @@
             </a:pPr>
             <a:r>
               <a:rPr lang="en-GB" sz="1800"/>
-              <a:t>Note: it does logical initialisation, while io_init_and_kb does os-specific initialization i/o initialisation</a:t>
+              <a:t>Note: it does logical initialisation, while io_init_and_kb does os-specific I/O initialisation</a:t>
             </a:r>
             <a:endParaRPr sz="1800"/>
           </a:p>
@@ -13768,7 +13851,7 @@
             <a:endParaRPr sz="1800"/>
           </a:p>
           <a:p>
-            <a:pPr indent="-317183" lvl="0" marL="457200" rtl="0" algn="l">
+            <a:pPr indent="-325755" lvl="0" marL="457200" rtl="0" algn="l">
               <a:spcBef>
                 <a:spcPts val="1200"/>
               </a:spcBef>
@@ -13785,7 +13868,7 @@
             <a:endParaRPr sz="1800"/>
           </a:p>
           <a:p>
-            <a:pPr indent="-317183" lvl="0" marL="457200" rtl="0" algn="l">
+            <a:pPr indent="-325755" lvl="0" marL="457200" rtl="0" algn="l">
               <a:spcBef>
                 <a:spcPts val="0"/>
               </a:spcBef>
@@ -14330,7 +14413,7 @@
         </p:spPr>
         <p:txBody>
           <a:bodyPr anchorCtr="0" anchor="t" bIns="91425" lIns="91425" spcFirstLastPara="1" rIns="91425" wrap="square" tIns="91425">
-            <a:normAutofit fontScale="85000" lnSpcReduction="10000"/>
+            <a:normAutofit fontScale="85000" lnSpcReduction="20000"/>
           </a:bodyPr>
           <a:lstStyle/>
           <a:p>
@@ -14350,7 +14433,15 @@
             </a:r>
             <a:r>
               <a:rPr lang="en-GB" sz="1800"/>
-              <a:t>rame_rate: the maximum amount of times the main loop would run per second</a:t>
+              <a:t>rame_rate: the maximum amount of times the main loop could run per second, typically the </a:t>
+            </a:r>
+            <a:r>
+              <a:rPr lang="en-GB" sz="1800"/>
+              <a:t>actual </a:t>
+            </a:r>
+            <a:r>
+              <a:rPr lang="en-GB" sz="1800"/>
+              <a:t>value should be close</a:t>
             </a:r>
             <a:endParaRPr sz="1800"/>
           </a:p>
@@ -14700,7 +14791,7 @@
             </a:pPr>
             <a:r>
               <a:rPr baseline="30000" lang="en-GB" sz="1800"/>
-              <a:t>A hook in programming often means a function to be called at an event</a:t>
+              <a:t>A hook in programming often means a function that could be called at an event</a:t>
             </a:r>
             <a:endParaRPr baseline="30000" sz="1800"/>
           </a:p>
@@ -14734,7 +14825,7 @@
             </a:pPr>
             <a:r>
               <a:rPr lang="en-GB" sz="1800"/>
-              <a:t>debug_key_actions: a dictionary of the hooks set in debug mode where the key of the dictionary is the key press as a character, w moves the bird up, s moves the bird down, d moves the pipes backwards (as if the bird moves forwards)</a:t>
+              <a:t>debug_key_actions: a dictionary of the hooks set in debug mode, where the key of the dictionary is the key press as a character, w moves the bird up, s moves the bird down, d moves the pipes backwards (as if the bird moves forwards)</a:t>
             </a:r>
             <a:endParaRPr sz="1800"/>
           </a:p>
